--- a/curso/pptx/S57.pptx
+++ b/curso/pptx/S57.pptx
@@ -5190,7 +5190,7 @@
                 </a:solidFill>
                 <a:latin typeface="Nunito Sans"/>
               </a:rPr>
-              <a:t>«No lo había pensado así.»</a:t>
+              <a:t>“我以前没有这样想过。”</a:t>
             </a:r>
           </a:p>
           <a:p>
@@ -5215,7 +5215,7 @@
                 </a:solidFill>
                 <a:latin typeface="Nunito Sans"/>
               </a:rPr>
-              <a:t>«En eso tienes razón.»</a:t>
+              <a:t>“这一点你说得对。”</a:t>
             </a:r>
           </a:p>
           <a:p>
@@ -5240,7 +5240,7 @@
                 </a:solidFill>
                 <a:latin typeface="Nunito Sans"/>
               </a:rPr>
-              <a:t>«Con esos datos, cambio de opinión.»</a:t>
+              <a:t>“有了这些数据，我改变看法。”</a:t>
             </a:r>
           </a:p>
         </p:txBody>
@@ -7034,7 +7034,7 @@
                 </a:solidFill>
                 <a:latin typeface="Nunito Sans"/>
               </a:rPr>
-              <a:t>No es rendirse: es aprender</a:t>
+              <a:t>这不是认输：而是学习</a:t>
             </a:r>
           </a:p>
           <a:p>
@@ -7059,7 +7059,7 @@
                 </a:solidFill>
                 <a:latin typeface="Nunito Sans"/>
               </a:rPr>
-              <a:t>Ya lo vimos en la 第1课: el pensador crítico cambia</a:t>
+              <a:t>我们在第1课已经看到：批判性思考的人会改变</a:t>
             </a:r>
           </a:p>
           <a:p>
@@ -7084,7 +7084,7 @@
                 </a:solidFill>
                 <a:latin typeface="Nunito Sans"/>
               </a:rPr>
-              <a:t>Mantener una idea con buenas razones también es pensar</a:t>
+              <a:t>带着好的理由坚持一个想法，也是在思考</a:t>
             </a:r>
           </a:p>
         </p:txBody>
@@ -7236,7 +7236,7 @@
                 </a:solidFill>
                 <a:latin typeface="Nunito Sans"/>
               </a:rPr>
-              <a:t>Orgullo:</a:t>
+              <a:t>自尊：</a:t>
             </a:r>
             <a:r>
               <a:rPr sz="2800" b="0">
@@ -7245,7 +7245,7 @@
                 </a:solidFill>
                 <a:latin typeface="Nunito Sans"/>
               </a:rPr>
-              <a:t> parece que pierdo o que quedo mal.</a:t>
+              <a:t>好像是我输了，或者丢了面子。</a:t>
             </a:r>
           </a:p>
           <a:p>
@@ -7270,7 +7270,7 @@
                 </a:solidFill>
                 <a:latin typeface="Nunito Sans"/>
               </a:rPr>
-              <a:t>Sesgo de confirmación:</a:t>
+              <a:t>确认偏见：</a:t>
             </a:r>
             <a:r>
               <a:rPr sz="2800" b="0">
@@ -7279,7 +7279,7 @@
                 </a:solidFill>
                 <a:latin typeface="Nunito Sans"/>
               </a:rPr>
-              <a:t> busco solo lo que me da la razón （第44课）.</a:t>
+              <a:t>我只找能证明我对的东西（第44课）。</a:t>
             </a:r>
           </a:p>
           <a:p>
@@ -7304,7 +7304,7 @@
                 </a:solidFill>
                 <a:latin typeface="Nunito Sans"/>
               </a:rPr>
-              <a:t>Grupo:</a:t>
+              <a:t>群体：</a:t>
             </a:r>
             <a:r>
               <a:rPr sz="2800" b="0">
@@ -7313,7 +7313,7 @@
                 </a:solidFill>
                 <a:latin typeface="Nunito Sans"/>
               </a:rPr>
-              <a:t> mis amigos piensan lo mismo.</a:t>
+              <a:t>我的朋友们想法都一样。</a:t>
             </a:r>
           </a:p>
           <a:p>
@@ -7338,7 +7338,7 @@
                 </a:solidFill>
                 <a:latin typeface="Nunito Sans"/>
               </a:rPr>
-              <a:t>Costumbre:</a:t>
+              <a:t>习惯：</a:t>
             </a:r>
             <a:r>
               <a:rPr sz="2800" b="0">
@@ -7347,7 +7347,7 @@
                 </a:solidFill>
                 <a:latin typeface="Nunito Sans"/>
               </a:rPr>
-              <a:t> llevo mucho tiempo creyéndolo.</a:t>
+              <a:t>我已经这样相信很久了。</a:t>
             </a:r>
           </a:p>
         </p:txBody>
@@ -7581,7 +7581,7 @@
                 </a:solidFill>
                 <a:latin typeface="Nunito Sans"/>
               </a:rPr>
-              <a:t>Por presión del grupo</a:t>
+              <a:t>因为群体的压力</a:t>
             </a:r>
           </a:p>
           <a:p>
@@ -7606,7 +7606,7 @@
                 </a:solidFill>
                 <a:latin typeface="Nunito Sans"/>
               </a:rPr>
-              <a:t>Por lo último que he oído</a:t>
+              <a:t>因为刚刚听到的最后一句话</a:t>
             </a:r>
           </a:p>
           <a:p>
@@ -7631,7 +7631,7 @@
                 </a:solidFill>
                 <a:latin typeface="Nunito Sans"/>
               </a:rPr>
-              <a:t>Para quedar bien</a:t>
+              <a:t>为了讨好别人</a:t>
             </a:r>
           </a:p>
         </p:txBody>
@@ -7761,7 +7761,7 @@
                 </a:solidFill>
                 <a:latin typeface="Nunito Sans"/>
               </a:rPr>
-              <a:t>Porque hay datos nuevos</a:t>
+              <a:t>因为有了新的数据</a:t>
             </a:r>
           </a:p>
           <a:p>
@@ -7786,7 +7786,7 @@
                 </a:solidFill>
                 <a:latin typeface="Nunito Sans"/>
               </a:rPr>
-              <a:t>Porque el otro argumento es mejor</a:t>
+              <a:t>因为对方的论证更好</a:t>
             </a:r>
           </a:p>
           <a:p>
@@ -7811,7 +7811,7 @@
                 </a:solidFill>
                 <a:latin typeface="Nunito Sans"/>
               </a:rPr>
-              <a:t>Porque descubro un error mío</a:t>
+              <a:t>因为我发现了自己的错误</a:t>
             </a:r>
           </a:p>
         </p:txBody>

--- a/curso/pptx/S57.pptx
+++ b/curso/pptx/S57.pptx
@@ -4047,7 +4047,7 @@
                 </a:solidFill>
                 <a:latin typeface="Fredoka"/>
               </a:rPr>
-              <a:t>案例1 · 迪伦和那个球员</a:t>
+              <a:t>案例1 · 一个男孩和那个球员</a:t>
             </a:r>
           </a:p>
         </p:txBody>
@@ -4129,7 +4129,7 @@
                 </a:solidFill>
                 <a:latin typeface="Nunito Sans"/>
               </a:rPr>
-              <a:t>迪伦说一个球员糟糕透了，因为他看到这个球员在一场比赛里失误。后来他看到了这名球员整个赛季的数据：他是最好的球员之一。</a:t>
+              <a:t>一个男孩说一个球员糟糕透了，因为他看到这个球员在一场比赛里失误。后来他看到了这名球员整个赛季的数据：他是最好的球员之一。</a:t>
             </a:r>
           </a:p>
         </p:txBody>
@@ -4356,7 +4356,7 @@
                 </a:solidFill>
                 <a:latin typeface="Fredoka"/>
               </a:rPr>
-              <a:t>案例2 · 雅斯敏，风向标</a:t>
+              <a:t>案例2 · 一个女孩，风向标</a:t>
             </a:r>
           </a:p>
         </p:txBody>
@@ -4438,7 +4438,7 @@
                 </a:solidFill>
                 <a:latin typeface="Nunito Sans"/>
               </a:rPr>
-              <a:t>雅斯敏认为穿校服是个好主意。她听了一位朋友的话，就持相反的看法。她听了另一位朋友的话，又改了回来。</a:t>
+              <a:t>一个女孩认为穿校服是个好主意。她听了一位朋友的话，就持相反的看法。她听了另一位朋友的话，又改了回来。</a:t>
             </a:r>
           </a:p>
         </p:txBody>
@@ -4747,7 +4747,7 @@
                 </a:solidFill>
                 <a:latin typeface="Nunito Sans"/>
               </a:rPr>
-              <a:t>蕾蕾说考试作弊不对。她的朋友们坚持说：“改变主意吧，别那么固执。不是说能改变才是聪明人吗？”</a:t>
+              <a:t>一个女孩说考试作弊不对。她的朋友们坚持说：“改变主意吧，别那么固执。不是说能改变才是聪明人吗？”</a:t>
             </a:r>
           </a:p>
         </p:txBody>
@@ -4795,7 +4795,7 @@
                 </a:solidFill>
                 <a:latin typeface="Nunito Sans"/>
               </a:rPr>
-              <a:t>改变主意是一种美德。蕾蕾应该改变吗？</a:t>
+              <a:t>改变主意是一种美德。这个女孩应该改变吗？</a:t>
             </a:r>
           </a:p>
           <a:p>
@@ -6657,7 +6657,7 @@
                 </a:solidFill>
                 <a:latin typeface="Nunito Sans"/>
               </a:rPr>
-              <a:t>迪伦在WhatsApp群里说某个球员糟糕透了。后来他看到了这名球员本赛季的数据：他是最好的球员之一。他什么也没说。</a:t>
+              <a:t>一个男孩在WhatsApp群里说某个球员糟糕透了。后来他看到了这名球员本赛季的数据：他是最好的球员之一。他什么也没说。</a:t>
             </a:r>
           </a:p>
         </p:txBody>
